--- a/promo/JumpStart-v2-Workshop-Highlights-zh-HK.pptx
+++ b/promo/JumpStart-v2-Workshop-Highlights-zh-HK.pptx
@@ -1809,7 +1809,7 @@
                 <a:ea typeface="Microsoft JhengHei" pitchFamily="34" charset="-122"/>
                 <a:cs typeface="Microsoft JhengHei" pitchFamily="34" charset="-120"/>
               </a:rPr>
-              <a:t>AI Agent JumpStart</a:t>
+              <a:t>AI Agent Workshop</a:t>
             </a:r>
             <a:endParaRPr lang="en-US" sz="4600" dirty="0"/>
           </a:p>
@@ -1821,7 +1821,7 @@
               <a:buNone/>
             </a:pPr>
             <a:r>
-              <a:rPr lang="en-US" sz="4600" b="1" dirty="0">
+              <a:rPr lang="en-US" sz="3400" b="1" dirty="0">
                 <a:solidFill>
                   <a:srgbClr val="A78BFA"/>
                 </a:solidFill>
@@ -1829,7 +1829,7 @@
                 <a:ea typeface="Microsoft JhengHei" pitchFamily="34" charset="-122"/>
                 <a:cs typeface="Microsoft JhengHei" pitchFamily="34" charset="-120"/>
               </a:rPr>
-              <a:t>Workshop v2</a:t>
+              <a:t>by Microsoft Agent GBB</a:t>
             </a:r>
             <a:endParaRPr lang="en-US" sz="4600" dirty="0"/>
           </a:p>
@@ -2498,7 +2498,7 @@
                 <a:ea typeface="Microsoft JhengHei" pitchFamily="34" charset="-122"/>
                 <a:cs typeface="Microsoft JhengHei" pitchFamily="34" charset="-120"/>
               </a:rPr>
-              <a:t>把 JumpStart v2 帶到你的 下一場客户研討會</a:t>
+              <a:t>把 AI Agent Workshop 帶到你的 下一場客户研討會</a:t>
             </a:r>
             <a:endParaRPr lang="en-US" sz="3600" dirty="0"/>
           </a:p>
@@ -2837,7 +2837,7 @@
                 <a:ea typeface="Consolas" pitchFamily="34" charset="-122"/>
                 <a:cs typeface="Consolas" pitchFamily="34" charset="-120"/>
               </a:rPr>
-              <a:t>aka.ms/ai-agent-jumpstart-v2</a:t>
+              <a:t>aka.ms/ai-agent-workshop-v2</a:t>
             </a:r>
             <a:endParaRPr lang="en-US" sz="1700" dirty="0"/>
           </a:p>
@@ -2876,7 +2876,7 @@
                 <a:ea typeface="Microsoft JhengHei" pitchFamily="34" charset="-122"/>
                 <a:cs typeface="Microsoft JhengHei" pitchFamily="34" charset="-120"/>
               </a:rPr>
-              <a:t>特別感謝 JumpStart v-Team 團隊的貢獻</a:t>
+              <a:t>特別感謝 AI Agent Workshop v-Team 團隊的貢獻</a:t>
             </a:r>
             <a:endParaRPr lang="en-US" sz="1200" dirty="0"/>
           </a:p>
@@ -3089,7 +3089,7 @@
         <p:spPr>
           <a:xfrm>
             <a:off x="5340096" y="6236208"/>
-            <a:ext cx="1645920" cy="347472"/>
+            <a:ext cx="1828800" cy="347472"/>
           </a:xfrm>
           <a:prstGeom prst="roundRect">
             <a:avLst>
@@ -3116,72 +3116,6 @@
         <p:spPr>
           <a:xfrm>
             <a:off x="5340096" y="6236208"/>
-            <a:ext cx="1645920" cy="347472"/>
-          </a:xfrm>
-          <a:prstGeom prst="rect">
-            <a:avLst/>
-          </a:prstGeom>
-          <a:noFill/>
-          <a:ln/>
-        </p:spPr>
-        <p:txBody>
-          <a:bodyPr wrap="square" lIns="0" tIns="0" rIns="0" bIns="0" rtlCol="0" anchor="ctr"/>
-          <a:lstStyle/>
-          <a:p>
-            <a:pPr algn="ctr" indent="0" marL="0">
-              <a:buNone/>
-            </a:pPr>
-            <a:r>
-              <a:rPr lang="en-US" sz="1100" b="1" dirty="0">
-                <a:solidFill>
-                  <a:srgbClr val="EFEDFA"/>
-                </a:solidFill>
-                <a:latin typeface="Microsoft JhengHei" pitchFamily="34" charset="0"/>
-                <a:ea typeface="Microsoft JhengHei" pitchFamily="34" charset="-122"/>
-                <a:cs typeface="Microsoft JhengHei" pitchFamily="34" charset="-120"/>
-              </a:rPr>
-              <a:t>Jalilah Halim</a:t>
-            </a:r>
-            <a:endParaRPr lang="en-US" sz="1100" dirty="0"/>
-          </a:p>
-        </p:txBody>
-      </p:sp>
-      <p:sp>
-        <p:nvSpPr>
-          <p:cNvPr id="25" name="Shape 21"/>
-          <p:cNvSpPr/>
-          <p:nvPr/>
-        </p:nvSpPr>
-        <p:spPr>
-          <a:xfrm>
-            <a:off x="7150608" y="6236208"/>
-            <a:ext cx="1828800" cy="347472"/>
-          </a:xfrm>
-          <a:prstGeom prst="roundRect">
-            <a:avLst>
-              <a:gd name="adj" fmla="val 26316"/>
-            </a:avLst>
-          </a:prstGeom>
-          <a:solidFill>
-            <a:srgbClr val="2B2450"/>
-          </a:solidFill>
-          <a:ln w="12700">
-            <a:solidFill>
-              <a:srgbClr val="3B3460"/>
-            </a:solidFill>
-            <a:prstDash val="solid"/>
-          </a:ln>
-        </p:spPr>
-      </p:sp>
-      <p:sp>
-        <p:nvSpPr>
-          <p:cNvPr id="26" name="Text 22"/>
-          <p:cNvSpPr/>
-          <p:nvPr/>
-        </p:nvSpPr>
-        <p:spPr>
-          <a:xfrm>
-            <a:off x="7150608" y="6236208"/>
             <a:ext cx="1828800" cy="347472"/>
           </a:xfrm>
           <a:prstGeom prst="rect">
